--- a/mst-qms/원본_정정본/2_프로세스_절차서_지침_양식/4_양식/COP_생산관리_비상사태 조직도.pptx
+++ b/mst-qms/원본_정정본/2_프로세스_절차서_지침_양식/4_양식/COP_생산관리_비상사태 조직도.pptx
@@ -13434,7 +13434,7 @@
                 <a:cs typeface="Gulim"/>
                 <a:sym typeface="Gulim"/>
               </a:rPr>
-              <a:t>               ㅡ 대표이사  : 김맹권</a:t>
+              <a:t>               ㅡ 대표이사  : 김명권</a:t>
             </a:r>
             <a:endParaRPr/>
           </a:p>
